--- a/decks/geog-gis/geog-gis_ch1_finding-places.pptx
+++ b/decks/geog-gis/geog-gis_ch1_finding-places.pptx
@@ -125,30 +125,30 @@
   <p:extLst>
     <p:ext uri="{521415D9-36F7-43E2-AB2F-B90AF26B5E84}">
       <p14:sectionLst xmlns:p14="http://schemas.microsoft.com/office/powerpoint/2010/main">
-        <p14:section name="Opening" id="{bffb7e1b-a302-d7f7-8b38-95a3884137df}">
+        <p14:section name="Opening" id="{35161b04-4c6d-d2b1-c371-8c43e7293ff3}">
           <p14:sldIdLst>
             <p14:sldId id="256"/>
           </p14:sldIdLst>
         </p14:section>
-        <p14:section name="Gate" id="{9346d5e4-0299-04f6-ad23-5a0af72a5432}">
+        <p14:section name="Gate" id="{6cfc94b6-4337-2c46-32a7-16a145b13049}">
           <p14:sldIdLst>
             <p14:sldId id="257"/>
             <p14:sldId id="258"/>
           </p14:sldIdLst>
         </p14:section>
-        <p14:section name="Pre-teach" id="{be4a5d09-816d-37a3-8c44-2d2ccf7d2c1b}">
+        <p14:section name="Pre-teach" id="{088e694d-be2e-6883-333d-0e2e59760e2c}">
           <p14:sldIdLst>
             <p14:sldId id="259"/>
             <p14:sldId id="260"/>
           </p14:sldIdLst>
         </p14:section>
-        <p14:section name="Read-along" id="{1148f46f-0d54-4e4f-5e3d-e8424132099e}">
+        <p14:section name="Read-along" id="{141d4345-e277-9a74-577b-c9ca22628f9c}">
           <p14:sldIdLst>
             <p14:sldId id="261"/>
             <p14:sldId id="262"/>
           </p14:sldIdLst>
         </p14:section>
-        <p14:section name="Teach" id="{2c697a10-5c3c-4f1a-d70d-b1fd9d5a8c39}">
+        <p14:section name="Teach" id="{62bb3c9d-be7f-9305-4f67-6bc389f58d7d}">
           <p14:sldIdLst>
             <p14:sldId id="263"/>
             <p14:sldId id="264"/>
@@ -156,7 +156,7 @@
             <p14:sldId id="266"/>
           </p14:sldIdLst>
         </p14:section>
-        <p14:section name="Routes" id="{8e3d97d1-106a-95a8-a172-f65d0d51b39c}">
+        <p14:section name="Routes" id="{7637219f-c428-a5ad-8890-bb883e756642}">
           <p14:sldIdLst>
             <p14:sldId id="267"/>
             <p14:sldId id="268"/>
@@ -164,12 +164,12 @@
             <p14:sldId id="270"/>
           </p14:sldIdLst>
         </p14:section>
-        <p14:section name="Close" id="{d194adeb-c105-5546-2a53-4681439133ec}">
+        <p14:section name="Close" id="{84b90ebc-12ed-5a05-c8f9-a74b0700b9c8}">
           <p14:sldIdLst>
             <p14:sldId id="271"/>
           </p14:sldIdLst>
         </p14:section>
-        <p14:section name="Answers" id="{e3572813-c371-9fea-601b-b655a440e823}">
+        <p14:section name="Answers" id="{0d217bb1-1181-36f3-42ee-269c69ba1266}">
           <p14:sldIdLst>
             <p14:sldId id="272"/>
             <p14:sldId id="273"/>
